--- a/tests/fixtures/corpus/small-font-03.pptx
+++ b/tests/fixtures/corpus/small-font-03.pptx
@@ -60,7 +60,7 @@
           <a:lstStyle/>
           <a:p>
             <a:r>
-              <a:rPr sz="900" latin="Aptos"/>
+              <a:rPr sz="600" latin="Aptos"/>
               <a:t>Evidence-backed summary</a:t>
             </a:r>
           </a:p>
